--- a/examples/ppt/textboxes/textboxes-advanced.pptx
+++ b/examples/ppt/textboxes/textboxes-advanced.pptx
@@ -5,12 +5,12 @@
     <p:sldMasterId xmlns:r="http://schemas.openxmlformats.org/officeDocument/2006/relationships" id="2147483648" r:id="rId1"/>
   </p:sldMasterIdLst>
   <p:sldIdLst>
-    <p:sldId id="256" r:id="Ra53b51e9734d4bb8"/>
-    <p:sldId id="257" r:id="R43b6f9fa53e94e69"/>
-    <p:sldId id="258" r:id="R969a639407534e3c"/>
-    <p:sldId id="259" r:id="R3eecade188a245d8"/>
-    <p:sldId id="260" r:id="Rde982eea5798400f"/>
-    <p:sldId id="261" r:id="Raf1335e67cf844b7"/>
+    <p:sldId id="256" r:id="R3e3bdae893f746ff"/>
+    <p:sldId id="257" r:id="Rb62b990fd0f94e3d"/>
+    <p:sldId id="258" r:id="Rd919095ea0c944b8"/>
+    <p:sldId id="259" r:id="Rd72b0d30fdc044a5"/>
+    <p:sldId id="260" r:id="Ra270ed7a5eca4b77"/>
+    <p:sldId id="261" r:id="R9a8cfdba2c094a27"/>
   </p:sldIdLst>
   <p:sldSz cx="12192000" cy="6858000"/>
   <p:notesSz cx="6858000" cy="9144000"/>
@@ -285,7 +285,7 @@
 </file>
 
 <file path=ppt/slideMasters/slideMaster1.xml><?xml version="1.0" encoding="utf-8"?>
-<p:sldMaster xmlns:p="http://schemas.openxmlformats.org/presentationml/2006/main">
+<p:sldMaster xmlns:r="http://schemas.openxmlformats.org/officeDocument/2006/relationships" xmlns:p="http://schemas.openxmlformats.org/presentationml/2006/main">
   <p:cSld>
     <p:spTree>
       <p:nvGrpSpPr>
